--- a/docs/PPT/基于PawBench的Agent评测_v6.3.pptx
+++ b/docs/PPT/基于PawBench的Agent评测_v6.3.pptx
@@ -122,7 +122,7 @@
   </p:defaultTextStyle>
   <p:extLst>
     <p:ext uri="{EFAFB233-063F-42B5-8137-9DF3F51BA10A}">
-      <p15:sldGuideLst xmlns="" xmlns:p15="http://schemas.microsoft.com/office/powerpoint/2012/main">
+      <p15:sldGuideLst xmlns:p15="http://schemas.microsoft.com/office/powerpoint/2012/main" xmlns="">
         <p15:guide id="1" orient="horz" pos="2160">
           <p15:clr>
             <a:srgbClr val="A4A3A4"/>
@@ -221,7 +221,7 @@
           <a:p>
             <a:fld id="{7928E26E-C721-426D-BD0D-694F8F6A3EA7}" type="datetimeFigureOut">
               <a:rPr lang="zh-CN" altLang="en-US" smtClean="0"/>
-              <a:t>2026/8/10</a:t>
+              <a:t>2026/8/31</a:t>
             </a:fld>
             <a:endParaRPr lang="zh-CN" altLang="en-US"/>
           </a:p>
@@ -507,24 +507,24 @@
       </p:grpSpPr>
       <p:sp>
         <p:nvSpPr>
-          <p:cNvPr id="2" name="Slide Image Placeholder 1"/>
+          <p:cNvPr id="2" name="幻灯片图像占位符 1"/>
           <p:cNvSpPr>
             <a:spLocks noGrp="1" noRot="1" noChangeAspect="1"/>
           </p:cNvSpPr>
           <p:nvPr>
-            <p:ph type="sldImg" idx="2"/>
+            <p:ph type="sldImg"/>
           </p:nvPr>
         </p:nvSpPr>
         <p:spPr/>
       </p:sp>
       <p:sp>
         <p:nvSpPr>
-          <p:cNvPr id="3" name="Notes Placeholder 2"/>
+          <p:cNvPr id="3" name="备注占位符 2"/>
           <p:cNvSpPr>
             <a:spLocks noGrp="1"/>
           </p:cNvSpPr>
           <p:nvPr>
-            <p:ph type="body" sz="quarter" idx="3"/>
+            <p:ph type="body" idx="1"/>
           </p:nvPr>
         </p:nvSpPr>
         <p:spPr/>
@@ -532,11 +532,39 @@
           <a:bodyPr/>
           <a:lstStyle/>
           <a:p>
-            <a:endParaRPr lang="zh-CN" dirty="0"/>
+            <a:endParaRPr lang="zh-CN" altLang="en-US" dirty="0"/>
+          </a:p>
+        </p:txBody>
+      </p:sp>
+      <p:sp>
+        <p:nvSpPr>
+          <p:cNvPr id="4" name="灯片编号占位符 3"/>
+          <p:cNvSpPr>
+            <a:spLocks noGrp="1"/>
+          </p:cNvSpPr>
+          <p:nvPr>
+            <p:ph type="sldNum" sz="quarter" idx="10"/>
+          </p:nvPr>
+        </p:nvSpPr>
+        <p:spPr/>
+        <p:txBody>
+          <a:bodyPr/>
+          <a:lstStyle/>
+          <a:p>
+            <a:fld id="{7A20E754-0B19-490E-A425-E11BEFCC9608}" type="slidenum">
+              <a:rPr lang="zh-CN" altLang="en-US" smtClean="0"/>
+              <a:t>1</a:t>
+            </a:fld>
+            <a:endParaRPr lang="zh-CN" altLang="en-US"/>
           </a:p>
         </p:txBody>
       </p:sp>
     </p:spTree>
+    <p:extLst>
+      <p:ext uri="{BB962C8B-B14F-4D97-AF65-F5344CB8AC3E}">
+        <p14:creationId xmlns:p14="http://schemas.microsoft.com/office/powerpoint/2010/main" val="3729419682"/>
+      </p:ext>
+    </p:extLst>
   </p:cSld>
   <p:clrMapOvr>
     <a:masterClrMapping/>
@@ -627,6 +655,62 @@
             <p:ph type="sldImg" idx="2"/>
           </p:nvPr>
         </p:nvSpPr>
+        <p:spPr/>
+      </p:sp>
+      <p:sp>
+        <p:nvSpPr>
+          <p:cNvPr id="3" name="Notes Placeholder 2"/>
+          <p:cNvSpPr>
+            <a:spLocks noGrp="1"/>
+          </p:cNvSpPr>
+          <p:nvPr>
+            <p:ph type="body" sz="quarter" idx="3"/>
+          </p:nvPr>
+        </p:nvSpPr>
+        <p:spPr/>
+        <p:txBody>
+          <a:bodyPr/>
+          <a:lstStyle/>
+          <a:p>
+            <a:endParaRPr lang="zh-CN" dirty="0"/>
+          </a:p>
+        </p:txBody>
+      </p:sp>
+    </p:spTree>
+  </p:cSld>
+  <p:clrMapOvr>
+    <a:masterClrMapping/>
+  </p:clrMapOvr>
+</p:notes>
+</file>
+
+<file path=ppt/notesSlides/notesSlide4.xml><?xml version="1.0" encoding="utf-8"?>
+<p:notes xmlns:a="http://schemas.openxmlformats.org/drawingml/2006/main" xmlns:r="http://schemas.openxmlformats.org/officeDocument/2006/relationships" xmlns:p="http://schemas.openxmlformats.org/presentationml/2006/main">
+  <p:cSld>
+    <p:spTree>
+      <p:nvGrpSpPr>
+        <p:cNvPr id="1" name=""/>
+        <p:cNvGrpSpPr/>
+        <p:nvPr/>
+      </p:nvGrpSpPr>
+      <p:grpSpPr>
+        <a:xfrm>
+          <a:off x="0" y="0"/>
+          <a:ext cx="0" cy="0"/>
+          <a:chOff x="0" y="0"/>
+          <a:chExt cx="0" cy="0"/>
+        </a:xfrm>
+      </p:grpSpPr>
+      <p:sp>
+        <p:nvSpPr>
+          <p:cNvPr id="2" name="Slide Image Placeholder 1"/>
+          <p:cNvSpPr>
+            <a:spLocks noGrp="1" noRot="1" noChangeAspect="1"/>
+          </p:cNvSpPr>
+          <p:nvPr>
+            <p:ph type="sldImg" idx="2"/>
+          </p:nvPr>
+        </p:nvSpPr>
         <p:spPr>
           <a:xfrm>
             <a:off x="381000" y="685800"/>
@@ -666,7 +750,7 @@
 </p:notes>
 </file>
 
-<file path=ppt/notesSlides/notesSlide4.xml><?xml version="1.0" encoding="utf-8"?>
+<file path=ppt/notesSlides/notesSlide5.xml><?xml version="1.0" encoding="utf-8"?>
 <p:notes xmlns:a="http://schemas.openxmlformats.org/drawingml/2006/main" xmlns:r="http://schemas.openxmlformats.org/officeDocument/2006/relationships" xmlns:p="http://schemas.openxmlformats.org/presentationml/2006/main">
   <p:cSld>
     <p:spTree>
@@ -784,7 +868,7 @@
           <a:p>
             <a:fld id="{5BCAD085-E8A6-8845-BD4E-CB4CCA059FC4}" type="datetimeFigureOut">
               <a:rPr lang="en-US" smtClean="0"/>
-              <a:t>8/10/2026</a:t>
+              <a:t>8/31/2026</a:t>
             </a:fld>
             <a:endParaRPr lang="en-US"/>
           </a:p>
@@ -897,7 +981,7 @@
           <a:p>
             <a:fld id="{5BCAD085-E8A6-8845-BD4E-CB4CCA059FC4}" type="datetimeFigureOut">
               <a:rPr lang="en-US" smtClean="0"/>
-              <a:t>8/10/2026</a:t>
+              <a:t>8/31/2026</a:t>
             </a:fld>
             <a:endParaRPr lang="en-US"/>
           </a:p>
@@ -4376,28 +4460,28 @@
                 <a:gridCol w="1626242">
                   <a:extLst>
                     <a:ext uri="{9D8B030D-6E8A-4147-A177-3AD203B41FA5}">
-                      <a16:colId xmlns="" xmlns:a16="http://schemas.microsoft.com/office/drawing/2014/main" val="20000"/>
+                      <a16:colId xmlns:a16="http://schemas.microsoft.com/office/drawing/2014/main" xmlns="" val="20000"/>
                     </a:ext>
                   </a:extLst>
                 </a:gridCol>
                 <a:gridCol w="2611843">
                   <a:extLst>
                     <a:ext uri="{9D8B030D-6E8A-4147-A177-3AD203B41FA5}">
-                      <a16:colId xmlns="" xmlns:a16="http://schemas.microsoft.com/office/drawing/2014/main" val="20001"/>
+                      <a16:colId xmlns:a16="http://schemas.microsoft.com/office/drawing/2014/main" xmlns="" val="20001"/>
                     </a:ext>
                   </a:extLst>
                 </a:gridCol>
                 <a:gridCol w="3006084">
                   <a:extLst>
                     <a:ext uri="{9D8B030D-6E8A-4147-A177-3AD203B41FA5}">
-                      <a16:colId xmlns="" xmlns:a16="http://schemas.microsoft.com/office/drawing/2014/main" val="20002"/>
+                      <a16:colId xmlns:a16="http://schemas.microsoft.com/office/drawing/2014/main" xmlns="" val="20002"/>
                     </a:ext>
                   </a:extLst>
                 </a:gridCol>
                 <a:gridCol w="4188805">
                   <a:extLst>
                     <a:ext uri="{9D8B030D-6E8A-4147-A177-3AD203B41FA5}">
-                      <a16:colId xmlns="" xmlns:a16="http://schemas.microsoft.com/office/drawing/2014/main" val="20003"/>
+                      <a16:colId xmlns:a16="http://schemas.microsoft.com/office/drawing/2014/main" xmlns="" val="20003"/>
                     </a:ext>
                   </a:extLst>
                 </a:gridCol>
@@ -4529,7 +4613,7 @@
                 </a:tc>
                 <a:extLst>
                   <a:ext uri="{0D108BD9-81ED-4DB2-BD59-A6C34878D82A}">
-                    <a16:rowId xmlns="" xmlns:a16="http://schemas.microsoft.com/office/drawing/2014/main" val="10000"/>
+                    <a16:rowId xmlns:a16="http://schemas.microsoft.com/office/drawing/2014/main" xmlns="" val="10000"/>
                   </a:ext>
                 </a:extLst>
               </a:tr>
@@ -4635,7 +4719,7 @@
                 </a:tc>
                 <a:extLst>
                   <a:ext uri="{0D108BD9-81ED-4DB2-BD59-A6C34878D82A}">
-                    <a16:rowId xmlns="" xmlns:a16="http://schemas.microsoft.com/office/drawing/2014/main" val="10001"/>
+                    <a16:rowId xmlns:a16="http://schemas.microsoft.com/office/drawing/2014/main" xmlns="" val="10001"/>
                   </a:ext>
                 </a:extLst>
               </a:tr>
@@ -4744,7 +4828,7 @@
                 </a:tc>
                 <a:extLst>
                   <a:ext uri="{0D108BD9-81ED-4DB2-BD59-A6C34878D82A}">
-                    <a16:rowId xmlns="" xmlns:a16="http://schemas.microsoft.com/office/drawing/2014/main" val="10002"/>
+                    <a16:rowId xmlns:a16="http://schemas.microsoft.com/office/drawing/2014/main" xmlns="" val="10002"/>
                   </a:ext>
                 </a:extLst>
               </a:tr>
@@ -4870,7 +4954,7 @@
                 </a:tc>
                 <a:extLst>
                   <a:ext uri="{0D108BD9-81ED-4DB2-BD59-A6C34878D82A}">
-                    <a16:rowId xmlns="" xmlns:a16="http://schemas.microsoft.com/office/drawing/2014/main" val="10003"/>
+                    <a16:rowId xmlns:a16="http://schemas.microsoft.com/office/drawing/2014/main" xmlns="" val="10003"/>
                   </a:ext>
                 </a:extLst>
               </a:tr>
@@ -4990,7 +5074,7 @@
                 </a:tc>
                 <a:extLst>
                   <a:ext uri="{0D108BD9-81ED-4DB2-BD59-A6C34878D82A}">
-                    <a16:rowId xmlns="" xmlns:a16="http://schemas.microsoft.com/office/drawing/2014/main" val="10004"/>
+                    <a16:rowId xmlns:a16="http://schemas.microsoft.com/office/drawing/2014/main" xmlns="" val="10004"/>
                   </a:ext>
                 </a:extLst>
               </a:tr>
@@ -5099,7 +5183,7 @@
                 </a:tc>
                 <a:extLst>
                   <a:ext uri="{0D108BD9-81ED-4DB2-BD59-A6C34878D82A}">
-                    <a16:rowId xmlns="" xmlns:a16="http://schemas.microsoft.com/office/drawing/2014/main" val="10005"/>
+                    <a16:rowId xmlns:a16="http://schemas.microsoft.com/office/drawing/2014/main" xmlns="" val="10005"/>
                   </a:ext>
                 </a:extLst>
               </a:tr>
@@ -5215,7 +5299,7 @@
                 </a:tc>
                 <a:extLst>
                   <a:ext uri="{0D108BD9-81ED-4DB2-BD59-A6C34878D82A}">
-                    <a16:rowId xmlns="" xmlns:a16="http://schemas.microsoft.com/office/drawing/2014/main" val="10006"/>
+                    <a16:rowId xmlns:a16="http://schemas.microsoft.com/office/drawing/2014/main" xmlns="" val="10006"/>
                   </a:ext>
                 </a:extLst>
               </a:tr>
@@ -5321,7 +5405,7 @@
                 </a:tc>
                 <a:extLst>
                   <a:ext uri="{0D108BD9-81ED-4DB2-BD59-A6C34878D82A}">
-                    <a16:rowId xmlns="" xmlns:a16="http://schemas.microsoft.com/office/drawing/2014/main" val="10007"/>
+                    <a16:rowId xmlns:a16="http://schemas.microsoft.com/office/drawing/2014/main" xmlns="" val="10007"/>
                   </a:ext>
                 </a:extLst>
               </a:tr>
@@ -5427,7 +5511,7 @@
                 </a:tc>
                 <a:extLst>
                   <a:ext uri="{0D108BD9-81ED-4DB2-BD59-A6C34878D82A}">
-                    <a16:rowId xmlns="" xmlns:a16="http://schemas.microsoft.com/office/drawing/2014/main" val="10008"/>
+                    <a16:rowId xmlns:a16="http://schemas.microsoft.com/office/drawing/2014/main" xmlns="" val="10008"/>
                   </a:ext>
                 </a:extLst>
               </a:tr>
@@ -9727,12 +9811,12 @@
             <a:graphicData uri="http://schemas.openxmlformats.org/presentationml/2006/ole">
               <mc:AlternateContent xmlns:mc="http://schemas.openxmlformats.org/markup-compatibility/2006">
                 <mc:Choice xmlns:v="urn:schemas-microsoft-com:vml" Requires="v">
-                  <p:oleObj spid="_x0000_s1053" name="工作表" showAsIcon="1" r:id="rId4" imgW="914400" imgH="787320" progId="Excel.Sheet.12">
+                  <p:oleObj spid="_x0000_s1056" name="工作表" showAsIcon="1" r:id="rId5" imgW="914400" imgH="787320" progId="Excel.Sheet.12">
                     <p:embed/>
                   </p:oleObj>
                 </mc:Choice>
                 <mc:Fallback>
-                  <p:oleObj name="工作表" showAsIcon="1" r:id="rId4" imgW="914400" imgH="787320" progId="Excel.Sheet.12">
+                  <p:oleObj name="工作表" showAsIcon="1" r:id="rId5" imgW="914400" imgH="787320" progId="Excel.Sheet.12">
                     <p:embed/>
                     <p:pic>
                       <p:nvPicPr>
@@ -9741,7 +9825,7 @@
                         <p:nvPr/>
                       </p:nvPicPr>
                       <p:blipFill>
-                        <a:blip r:embed="rId5"/>
+                        <a:blip r:embed="rId6"/>
                         <a:stretch>
                           <a:fillRect/>
                         </a:stretch>
@@ -9799,12 +9883,12 @@
             <a:graphicData uri="http://schemas.openxmlformats.org/presentationml/2006/ole">
               <mc:AlternateContent xmlns:mc="http://schemas.openxmlformats.org/markup-compatibility/2006">
                 <mc:Choice xmlns:v="urn:schemas-microsoft-com:vml" Requires="v">
-                  <p:oleObj spid="_x0000_s1054" name="工作表" showAsIcon="1" r:id="rId6" imgW="914400" imgH="787320" progId="Excel.Sheet.12">
+                  <p:oleObj spid="_x0000_s1057" name="工作表" showAsIcon="1" r:id="rId8" imgW="914400" imgH="787320" progId="Excel.Sheet.12">
                     <p:embed/>
                   </p:oleObj>
                 </mc:Choice>
                 <mc:Fallback>
-                  <p:oleObj name="工作表" showAsIcon="1" r:id="rId6" imgW="914400" imgH="787320" progId="Excel.Sheet.12">
+                  <p:oleObj name="工作表" showAsIcon="1" r:id="rId8" imgW="914400" imgH="787320" progId="Excel.Sheet.12">
                     <p:embed/>
                     <p:pic>
                       <p:nvPicPr>
@@ -9813,7 +9897,7 @@
                         <p:nvPr/>
                       </p:nvPicPr>
                       <p:blipFill>
-                        <a:blip r:embed="rId7"/>
+                        <a:blip r:embed="rId9"/>
                         <a:stretch>
                           <a:fillRect/>
                         </a:stretch>
@@ -9973,12 +10057,12 @@
             <a:graphicData uri="http://schemas.openxmlformats.org/presentationml/2006/ole">
               <mc:AlternateContent xmlns:mc="http://schemas.openxmlformats.org/markup-compatibility/2006">
                 <mc:Choice xmlns:v="urn:schemas-microsoft-com:vml" Requires="v">
-                  <p:oleObj spid="_x0000_s1055" name="工作表" showAsIcon="1" r:id="rId8" imgW="914400" imgH="787320" progId="Excel.Sheet.12">
+                  <p:oleObj spid="_x0000_s1058" name="工作表" showAsIcon="1" r:id="rId11" imgW="914400" imgH="787320" progId="Excel.Sheet.12">
                     <p:embed/>
                   </p:oleObj>
                 </mc:Choice>
                 <mc:Fallback>
-                  <p:oleObj name="工作表" showAsIcon="1" r:id="rId8" imgW="914400" imgH="787320" progId="Excel.Sheet.12">
+                  <p:oleObj name="工作表" showAsIcon="1" r:id="rId11" imgW="914400" imgH="787320" progId="Excel.Sheet.12">
                     <p:embed/>
                     <p:pic>
                       <p:nvPicPr>
@@ -9987,7 +10071,7 @@
                         <p:nvPr/>
                       </p:nvPicPr>
                       <p:blipFill>
-                        <a:blip r:embed="rId9"/>
+                        <a:blip r:embed="rId12"/>
                         <a:stretch>
                           <a:fillRect/>
                         </a:stretch>
@@ -25849,7 +25933,7 @@
         <p:spPr>
           <a:xfrm>
             <a:off x="757238" y="5964883"/>
-            <a:ext cx="6778885" cy="176212"/>
+            <a:ext cx="6166753" cy="138499"/>
           </a:xfrm>
           <a:prstGeom prst="rect">
             <a:avLst/>
@@ -25875,7 +25959,51 @@
                 <a:ea typeface="Microsoft YaHei"/>
                 <a:cs typeface="Segoe UI"/>
               </a:rPr>
-              <a:t>数据来源：PawBench OpenJudge 评测引擎 · 截至 2025 年 7 月 · 平均分 = 跨 harness 加权 · 单元格颜色深浅代表分数高低</a:t>
+              <a:t>数据来源：PawBench OpenJudge 评测引擎 · 截至 </a:t>
+            </a:r>
+            <a:r>
+              <a:rPr lang="zh-CN" sz="900" dirty="0" smtClean="0">
+                <a:solidFill>
+                  <a:schemeClr val="accent6"/>
+                </a:solidFill>
+                <a:latin typeface="Segoe UI"/>
+                <a:ea typeface="Microsoft YaHei"/>
+                <a:cs typeface="Segoe UI"/>
+              </a:rPr>
+              <a:t>202</a:t>
+            </a:r>
+            <a:r>
+              <a:rPr lang="en-US" altLang="zh-CN" sz="900" dirty="0" smtClean="0">
+                <a:solidFill>
+                  <a:schemeClr val="accent6"/>
+                </a:solidFill>
+                <a:latin typeface="Segoe UI"/>
+                <a:ea typeface="Microsoft YaHei"/>
+                <a:cs typeface="Segoe UI"/>
+              </a:rPr>
+              <a:t>6</a:t>
+            </a:r>
+            <a:r>
+              <a:rPr lang="zh-CN" sz="900" dirty="0" smtClean="0">
+                <a:solidFill>
+                  <a:schemeClr val="accent6"/>
+                </a:solidFill>
+                <a:latin typeface="Segoe UI"/>
+                <a:ea typeface="Microsoft YaHei"/>
+                <a:cs typeface="Segoe UI"/>
+              </a:rPr>
+              <a:t> </a:t>
+            </a:r>
+            <a:r>
+              <a:rPr lang="zh-CN" sz="900" dirty="0">
+                <a:solidFill>
+                  <a:schemeClr val="accent6"/>
+                </a:solidFill>
+                <a:latin typeface="Segoe UI"/>
+                <a:ea typeface="Microsoft YaHei"/>
+                <a:cs typeface="Segoe UI"/>
+              </a:rPr>
+              <a:t>年 7 月 · 平均分 = 跨 harness 加权 · 单元格颜色深浅代表分数高低</a:t>
             </a:r>
           </a:p>
         </p:txBody>
